--- a/material/芯师傅ChipMaster路演PPT.pptx
+++ b/material/芯师傅ChipMaster路演PPT.pptx
@@ -5212,7 +5212,7 @@
                 <a:latin typeface="微软雅黑"/>
                 <a:ea typeface="微软雅黑"/>
               </a:rPr>
-              <a:t>36 条知识点 + 13 个模板 + 8 个向导，全部</a:t>
+              <a:t>37 条知识点 + 13 个模板 + 8 个向导，全部</a:t>
             </a:r>
           </a:p>
           <a:p>
@@ -9577,7 +9577,7 @@
                 <a:latin typeface="微软雅黑"/>
                 <a:ea typeface="微软雅黑"/>
               </a:rPr>
-              <a:t>36 条核心知识点，分类浏览 + 搜索</a:t>
+              <a:t>37 条核心知识点，分类浏览 + 搜索</a:t>
             </a:r>
           </a:p>
         </p:txBody>
